--- a/05. HTTP/HTTP.pptx
+++ b/05. HTTP/HTTP.pptx
@@ -297,6 +297,355 @@
 
 <file path=ppt/changesInfos/changesInfo1.xml><?xml version="1.0" encoding="utf-8"?>
 <pc:chgInfo xmlns:a="http://schemas.openxmlformats.org/drawingml/2006/main" xmlns:r="http://schemas.openxmlformats.org/officeDocument/2006/relationships" xmlns:ac="http://schemas.microsoft.com/office/drawing/2013/main/command" xmlns:pc="http://schemas.microsoft.com/office/powerpoint/2013/main/command">
+  <pc:docChgLst>
+    <pc:chgData name="Riccardo Berta" userId="c8694f89-bba4-4576-b0a8-456619ca5a8c" providerId="ADAL" clId="{3F77A462-6347-E641-AA99-0C769B8B031A}"/>
+    <pc:docChg chg="undo custSel modSld">
+      <pc:chgData name="Riccardo Berta" userId="c8694f89-bba4-4576-b0a8-456619ca5a8c" providerId="ADAL" clId="{3F77A462-6347-E641-AA99-0C769B8B031A}" dt="2022-03-16T09:45:29.960" v="220" actId="20577"/>
+      <pc:docMkLst>
+        <pc:docMk/>
+      </pc:docMkLst>
+      <pc:sldChg chg="addSp modSp mod modNotes">
+        <pc:chgData name="Riccardo Berta" userId="c8694f89-bba4-4576-b0a8-456619ca5a8c" providerId="ADAL" clId="{3F77A462-6347-E641-AA99-0C769B8B031A}" dt="2022-03-11T12:13:12.844" v="32" actId="1076"/>
+        <pc:sldMkLst>
+          <pc:docMk/>
+          <pc:sldMk cId="0" sldId="257"/>
+        </pc:sldMkLst>
+        <pc:spChg chg="mod">
+          <ac:chgData name="Riccardo Berta" userId="c8694f89-bba4-4576-b0a8-456619ca5a8c" providerId="ADAL" clId="{3F77A462-6347-E641-AA99-0C769B8B031A}" dt="2022-03-11T12:13:10.767" v="31" actId="1076"/>
+          <ac:spMkLst>
+            <pc:docMk/>
+            <pc:sldMk cId="0" sldId="257"/>
+            <ac:spMk id="137" creationId="{00000000-0000-0000-0000-000000000000}"/>
+          </ac:spMkLst>
+        </pc:spChg>
+        <pc:picChg chg="mod">
+          <ac:chgData name="Riccardo Berta" userId="c8694f89-bba4-4576-b0a8-456619ca5a8c" providerId="ADAL" clId="{3F77A462-6347-E641-AA99-0C769B8B031A}" dt="2022-03-09T07:50:58.538" v="0"/>
+          <ac:picMkLst>
+            <pc:docMk/>
+            <pc:sldMk cId="0" sldId="257"/>
+            <ac:picMk id="138" creationId="{00000000-0000-0000-0000-000000000000}"/>
+          </ac:picMkLst>
+        </pc:picChg>
+        <pc:picChg chg="add mod">
+          <ac:chgData name="Riccardo Berta" userId="c8694f89-bba4-4576-b0a8-456619ca5a8c" providerId="ADAL" clId="{3F77A462-6347-E641-AA99-0C769B8B031A}" dt="2022-03-11T12:13:12.844" v="32" actId="1076"/>
+          <ac:picMkLst>
+            <pc:docMk/>
+            <pc:sldMk cId="0" sldId="257"/>
+            <ac:picMk id="1026" creationId="{C8FFA10B-2EBE-A649-BE34-AB2456924AC7}"/>
+          </ac:picMkLst>
+        </pc:picChg>
+      </pc:sldChg>
+      <pc:sldChg chg="modSp mod">
+        <pc:chgData name="Riccardo Berta" userId="c8694f89-bba4-4576-b0a8-456619ca5a8c" providerId="ADAL" clId="{3F77A462-6347-E641-AA99-0C769B8B031A}" dt="2022-03-11T12:13:55.107" v="34" actId="1076"/>
+        <pc:sldMkLst>
+          <pc:docMk/>
+          <pc:sldMk cId="0" sldId="258"/>
+        </pc:sldMkLst>
+        <pc:picChg chg="mod">
+          <ac:chgData name="Riccardo Berta" userId="c8694f89-bba4-4576-b0a8-456619ca5a8c" providerId="ADAL" clId="{3F77A462-6347-E641-AA99-0C769B8B031A}" dt="2022-03-11T12:13:55.107" v="34" actId="1076"/>
+          <ac:picMkLst>
+            <pc:docMk/>
+            <pc:sldMk cId="0" sldId="258"/>
+            <ac:picMk id="145" creationId="{00000000-0000-0000-0000-000000000000}"/>
+          </ac:picMkLst>
+        </pc:picChg>
+        <pc:picChg chg="mod">
+          <ac:chgData name="Riccardo Berta" userId="c8694f89-bba4-4576-b0a8-456619ca5a8c" providerId="ADAL" clId="{3F77A462-6347-E641-AA99-0C769B8B031A}" dt="2022-03-09T07:51:15.296" v="1"/>
+          <ac:picMkLst>
+            <pc:docMk/>
+            <pc:sldMk cId="0" sldId="258"/>
+            <ac:picMk id="146" creationId="{00000000-0000-0000-0000-000000000000}"/>
+          </ac:picMkLst>
+        </pc:picChg>
+      </pc:sldChg>
+      <pc:sldChg chg="modSp">
+        <pc:chgData name="Riccardo Berta" userId="c8694f89-bba4-4576-b0a8-456619ca5a8c" providerId="ADAL" clId="{3F77A462-6347-E641-AA99-0C769B8B031A}" dt="2022-03-09T07:51:41.496" v="3"/>
+        <pc:sldMkLst>
+          <pc:docMk/>
+          <pc:sldMk cId="0" sldId="259"/>
+        </pc:sldMkLst>
+        <pc:picChg chg="mod">
+          <ac:chgData name="Riccardo Berta" userId="c8694f89-bba4-4576-b0a8-456619ca5a8c" providerId="ADAL" clId="{3F77A462-6347-E641-AA99-0C769B8B031A}" dt="2022-03-09T07:51:41.496" v="3"/>
+          <ac:picMkLst>
+            <pc:docMk/>
+            <pc:sldMk cId="0" sldId="259"/>
+            <ac:picMk id="171" creationId="{00000000-0000-0000-0000-000000000000}"/>
+          </ac:picMkLst>
+        </pc:picChg>
+      </pc:sldChg>
+      <pc:sldChg chg="modSp mod">
+        <pc:chgData name="Riccardo Berta" userId="c8694f89-bba4-4576-b0a8-456619ca5a8c" providerId="ADAL" clId="{3F77A462-6347-E641-AA99-0C769B8B031A}" dt="2022-03-11T12:21:40.468" v="36" actId="167"/>
+        <pc:sldMkLst>
+          <pc:docMk/>
+          <pc:sldMk cId="0" sldId="260"/>
+        </pc:sldMkLst>
+        <pc:picChg chg="mod">
+          <ac:chgData name="Riccardo Berta" userId="c8694f89-bba4-4576-b0a8-456619ca5a8c" providerId="ADAL" clId="{3F77A462-6347-E641-AA99-0C769B8B031A}" dt="2022-03-11T12:21:40.468" v="36" actId="167"/>
+          <ac:picMkLst>
+            <pc:docMk/>
+            <pc:sldMk cId="0" sldId="260"/>
+            <ac:picMk id="179" creationId="{00000000-0000-0000-0000-000000000000}"/>
+          </ac:picMkLst>
+        </pc:picChg>
+        <pc:picChg chg="mod">
+          <ac:chgData name="Riccardo Berta" userId="c8694f89-bba4-4576-b0a8-456619ca5a8c" providerId="ADAL" clId="{3F77A462-6347-E641-AA99-0C769B8B031A}" dt="2022-03-09T07:52:02.933" v="4"/>
+          <ac:picMkLst>
+            <pc:docMk/>
+            <pc:sldMk cId="0" sldId="260"/>
+            <ac:picMk id="180" creationId="{00000000-0000-0000-0000-000000000000}"/>
+          </ac:picMkLst>
+        </pc:picChg>
+      </pc:sldChg>
+      <pc:sldChg chg="modSp mod">
+        <pc:chgData name="Riccardo Berta" userId="c8694f89-bba4-4576-b0a8-456619ca5a8c" providerId="ADAL" clId="{3F77A462-6347-E641-AA99-0C769B8B031A}" dt="2022-03-09T07:52:21.749" v="6"/>
+        <pc:sldMkLst>
+          <pc:docMk/>
+          <pc:sldMk cId="0" sldId="261"/>
+        </pc:sldMkLst>
+        <pc:picChg chg="mod">
+          <ac:chgData name="Riccardo Berta" userId="c8694f89-bba4-4576-b0a8-456619ca5a8c" providerId="ADAL" clId="{3F77A462-6347-E641-AA99-0C769B8B031A}" dt="2022-03-09T07:52:21.749" v="6"/>
+          <ac:picMkLst>
+            <pc:docMk/>
+            <pc:sldMk cId="0" sldId="261"/>
+            <ac:picMk id="187" creationId="{00000000-0000-0000-0000-000000000000}"/>
+          </ac:picMkLst>
+        </pc:picChg>
+      </pc:sldChg>
+      <pc:sldChg chg="modSp">
+        <pc:chgData name="Riccardo Berta" userId="c8694f89-bba4-4576-b0a8-456619ca5a8c" providerId="ADAL" clId="{3F77A462-6347-E641-AA99-0C769B8B031A}" dt="2022-03-09T07:52:39.725" v="7"/>
+        <pc:sldMkLst>
+          <pc:docMk/>
+          <pc:sldMk cId="0" sldId="262"/>
+        </pc:sldMkLst>
+        <pc:picChg chg="mod">
+          <ac:chgData name="Riccardo Berta" userId="c8694f89-bba4-4576-b0a8-456619ca5a8c" providerId="ADAL" clId="{3F77A462-6347-E641-AA99-0C769B8B031A}" dt="2022-03-09T07:52:39.725" v="7"/>
+          <ac:picMkLst>
+            <pc:docMk/>
+            <pc:sldMk cId="0" sldId="262"/>
+            <ac:picMk id="194" creationId="{00000000-0000-0000-0000-000000000000}"/>
+          </ac:picMkLst>
+        </pc:picChg>
+      </pc:sldChg>
+      <pc:sldChg chg="modSp">
+        <pc:chgData name="Riccardo Berta" userId="c8694f89-bba4-4576-b0a8-456619ca5a8c" providerId="ADAL" clId="{3F77A462-6347-E641-AA99-0C769B8B031A}" dt="2022-03-09T07:52:55.942" v="8"/>
+        <pc:sldMkLst>
+          <pc:docMk/>
+          <pc:sldMk cId="0" sldId="263"/>
+        </pc:sldMkLst>
+        <pc:picChg chg="mod">
+          <ac:chgData name="Riccardo Berta" userId="c8694f89-bba4-4576-b0a8-456619ca5a8c" providerId="ADAL" clId="{3F77A462-6347-E641-AA99-0C769B8B031A}" dt="2022-03-09T07:52:55.942" v="8"/>
+          <ac:picMkLst>
+            <pc:docMk/>
+            <pc:sldMk cId="0" sldId="263"/>
+            <ac:picMk id="201" creationId="{00000000-0000-0000-0000-000000000000}"/>
+          </ac:picMkLst>
+        </pc:picChg>
+      </pc:sldChg>
+      <pc:sldChg chg="modSp">
+        <pc:chgData name="Riccardo Berta" userId="c8694f89-bba4-4576-b0a8-456619ca5a8c" providerId="ADAL" clId="{3F77A462-6347-E641-AA99-0C769B8B031A}" dt="2022-03-09T07:53:19.757" v="9"/>
+        <pc:sldMkLst>
+          <pc:docMk/>
+          <pc:sldMk cId="0" sldId="265"/>
+        </pc:sldMkLst>
+        <pc:picChg chg="mod">
+          <ac:chgData name="Riccardo Berta" userId="c8694f89-bba4-4576-b0a8-456619ca5a8c" providerId="ADAL" clId="{3F77A462-6347-E641-AA99-0C769B8B031A}" dt="2022-03-09T07:53:19.757" v="9"/>
+          <ac:picMkLst>
+            <pc:docMk/>
+            <pc:sldMk cId="0" sldId="265"/>
+            <ac:picMk id="215" creationId="{00000000-0000-0000-0000-000000000000}"/>
+          </ac:picMkLst>
+        </pc:picChg>
+      </pc:sldChg>
+      <pc:sldChg chg="modSp">
+        <pc:chgData name="Riccardo Berta" userId="c8694f89-bba4-4576-b0a8-456619ca5a8c" providerId="ADAL" clId="{3F77A462-6347-E641-AA99-0C769B8B031A}" dt="2022-03-09T07:53:34.123" v="10"/>
+        <pc:sldMkLst>
+          <pc:docMk/>
+          <pc:sldMk cId="0" sldId="266"/>
+        </pc:sldMkLst>
+        <pc:picChg chg="mod">
+          <ac:chgData name="Riccardo Berta" userId="c8694f89-bba4-4576-b0a8-456619ca5a8c" providerId="ADAL" clId="{3F77A462-6347-E641-AA99-0C769B8B031A}" dt="2022-03-09T07:53:34.123" v="10"/>
+          <ac:picMkLst>
+            <pc:docMk/>
+            <pc:sldMk cId="0" sldId="266"/>
+            <ac:picMk id="222" creationId="{00000000-0000-0000-0000-000000000000}"/>
+          </ac:picMkLst>
+        </pc:picChg>
+      </pc:sldChg>
+      <pc:sldChg chg="modSp">
+        <pc:chgData name="Riccardo Berta" userId="c8694f89-bba4-4576-b0a8-456619ca5a8c" providerId="ADAL" clId="{3F77A462-6347-E641-AA99-0C769B8B031A}" dt="2022-03-09T07:53:50.564" v="11"/>
+        <pc:sldMkLst>
+          <pc:docMk/>
+          <pc:sldMk cId="0" sldId="267"/>
+        </pc:sldMkLst>
+        <pc:picChg chg="mod">
+          <ac:chgData name="Riccardo Berta" userId="c8694f89-bba4-4576-b0a8-456619ca5a8c" providerId="ADAL" clId="{3F77A462-6347-E641-AA99-0C769B8B031A}" dt="2022-03-09T07:53:50.564" v="11"/>
+          <ac:picMkLst>
+            <pc:docMk/>
+            <pc:sldMk cId="0" sldId="267"/>
+            <ac:picMk id="229" creationId="{00000000-0000-0000-0000-000000000000}"/>
+          </ac:picMkLst>
+        </pc:picChg>
+      </pc:sldChg>
+      <pc:sldChg chg="modSp">
+        <pc:chgData name="Riccardo Berta" userId="c8694f89-bba4-4576-b0a8-456619ca5a8c" providerId="ADAL" clId="{3F77A462-6347-E641-AA99-0C769B8B031A}" dt="2022-03-09T07:54:05.287" v="12"/>
+        <pc:sldMkLst>
+          <pc:docMk/>
+          <pc:sldMk cId="0" sldId="268"/>
+        </pc:sldMkLst>
+        <pc:picChg chg="mod">
+          <ac:chgData name="Riccardo Berta" userId="c8694f89-bba4-4576-b0a8-456619ca5a8c" providerId="ADAL" clId="{3F77A462-6347-E641-AA99-0C769B8B031A}" dt="2022-03-09T07:54:05.287" v="12"/>
+          <ac:picMkLst>
+            <pc:docMk/>
+            <pc:sldMk cId="0" sldId="268"/>
+            <ac:picMk id="236" creationId="{00000000-0000-0000-0000-000000000000}"/>
+          </ac:picMkLst>
+        </pc:picChg>
+      </pc:sldChg>
+      <pc:sldChg chg="modSp">
+        <pc:chgData name="Riccardo Berta" userId="c8694f89-bba4-4576-b0a8-456619ca5a8c" providerId="ADAL" clId="{3F77A462-6347-E641-AA99-0C769B8B031A}" dt="2022-03-09T07:54:21.879" v="13"/>
+        <pc:sldMkLst>
+          <pc:docMk/>
+          <pc:sldMk cId="0" sldId="269"/>
+        </pc:sldMkLst>
+        <pc:picChg chg="mod">
+          <ac:chgData name="Riccardo Berta" userId="c8694f89-bba4-4576-b0a8-456619ca5a8c" providerId="ADAL" clId="{3F77A462-6347-E641-AA99-0C769B8B031A}" dt="2022-03-09T07:54:21.879" v="13"/>
+          <ac:picMkLst>
+            <pc:docMk/>
+            <pc:sldMk cId="0" sldId="269"/>
+            <ac:picMk id="250" creationId="{00000000-0000-0000-0000-000000000000}"/>
+          </ac:picMkLst>
+        </pc:picChg>
+      </pc:sldChg>
+      <pc:sldChg chg="modSp mod">
+        <pc:chgData name="Riccardo Berta" userId="c8694f89-bba4-4576-b0a8-456619ca5a8c" providerId="ADAL" clId="{3F77A462-6347-E641-AA99-0C769B8B031A}" dt="2022-03-11T12:28:10.724" v="44" actId="12"/>
+        <pc:sldMkLst>
+          <pc:docMk/>
+          <pc:sldMk cId="0" sldId="270"/>
+        </pc:sldMkLst>
+        <pc:spChg chg="mod">
+          <ac:chgData name="Riccardo Berta" userId="c8694f89-bba4-4576-b0a8-456619ca5a8c" providerId="ADAL" clId="{3F77A462-6347-E641-AA99-0C769B8B031A}" dt="2022-03-11T12:28:10.724" v="44" actId="12"/>
+          <ac:spMkLst>
+            <pc:docMk/>
+            <pc:sldMk cId="0" sldId="270"/>
+            <ac:spMk id="256" creationId="{00000000-0000-0000-0000-000000000000}"/>
+          </ac:spMkLst>
+        </pc:spChg>
+        <pc:picChg chg="mod">
+          <ac:chgData name="Riccardo Berta" userId="c8694f89-bba4-4576-b0a8-456619ca5a8c" providerId="ADAL" clId="{3F77A462-6347-E641-AA99-0C769B8B031A}" dt="2022-03-11T12:27:30.095" v="40" actId="1076"/>
+          <ac:picMkLst>
+            <pc:docMk/>
+            <pc:sldMk cId="0" sldId="270"/>
+            <ac:picMk id="257" creationId="{00000000-0000-0000-0000-000000000000}"/>
+          </ac:picMkLst>
+        </pc:picChg>
+      </pc:sldChg>
+      <pc:sldChg chg="modSp">
+        <pc:chgData name="Riccardo Berta" userId="c8694f89-bba4-4576-b0a8-456619ca5a8c" providerId="ADAL" clId="{3F77A462-6347-E641-AA99-0C769B8B031A}" dt="2022-03-09T07:55:07.493" v="17"/>
+        <pc:sldMkLst>
+          <pc:docMk/>
+          <pc:sldMk cId="0" sldId="271"/>
+        </pc:sldMkLst>
+        <pc:picChg chg="mod">
+          <ac:chgData name="Riccardo Berta" userId="c8694f89-bba4-4576-b0a8-456619ca5a8c" providerId="ADAL" clId="{3F77A462-6347-E641-AA99-0C769B8B031A}" dt="2022-03-09T07:55:07.493" v="17"/>
+          <ac:picMkLst>
+            <pc:docMk/>
+            <pc:sldMk cId="0" sldId="271"/>
+            <ac:picMk id="264" creationId="{00000000-0000-0000-0000-000000000000}"/>
+          </ac:picMkLst>
+        </pc:picChg>
+      </pc:sldChg>
+      <pc:sldChg chg="modSp">
+        <pc:chgData name="Riccardo Berta" userId="c8694f89-bba4-4576-b0a8-456619ca5a8c" providerId="ADAL" clId="{3F77A462-6347-E641-AA99-0C769B8B031A}" dt="2022-03-09T07:55:31.746" v="18"/>
+        <pc:sldMkLst>
+          <pc:docMk/>
+          <pc:sldMk cId="0" sldId="272"/>
+        </pc:sldMkLst>
+        <pc:picChg chg="mod">
+          <ac:chgData name="Riccardo Berta" userId="c8694f89-bba4-4576-b0a8-456619ca5a8c" providerId="ADAL" clId="{3F77A462-6347-E641-AA99-0C769B8B031A}" dt="2022-03-09T07:55:31.746" v="18"/>
+          <ac:picMkLst>
+            <pc:docMk/>
+            <pc:sldMk cId="0" sldId="272"/>
+            <ac:picMk id="272" creationId="{00000000-0000-0000-0000-000000000000}"/>
+          </ac:picMkLst>
+        </pc:picChg>
+      </pc:sldChg>
+      <pc:sldChg chg="modSp">
+        <pc:chgData name="Riccardo Berta" userId="c8694f89-bba4-4576-b0a8-456619ca5a8c" providerId="ADAL" clId="{3F77A462-6347-E641-AA99-0C769B8B031A}" dt="2022-03-09T07:58:55.124" v="22"/>
+        <pc:sldMkLst>
+          <pc:docMk/>
+          <pc:sldMk cId="0" sldId="273"/>
+        </pc:sldMkLst>
+        <pc:picChg chg="mod">
+          <ac:chgData name="Riccardo Berta" userId="c8694f89-bba4-4576-b0a8-456619ca5a8c" providerId="ADAL" clId="{3F77A462-6347-E641-AA99-0C769B8B031A}" dt="2022-03-09T07:58:55.124" v="22"/>
+          <ac:picMkLst>
+            <pc:docMk/>
+            <pc:sldMk cId="0" sldId="273"/>
+            <ac:picMk id="283" creationId="{00000000-0000-0000-0000-000000000000}"/>
+          </ac:picMkLst>
+        </pc:picChg>
+      </pc:sldChg>
+      <pc:sldChg chg="modSp">
+        <pc:chgData name="Riccardo Berta" userId="c8694f89-bba4-4576-b0a8-456619ca5a8c" providerId="ADAL" clId="{3F77A462-6347-E641-AA99-0C769B8B031A}" dt="2022-03-09T07:57:44.129" v="19"/>
+        <pc:sldMkLst>
+          <pc:docMk/>
+          <pc:sldMk cId="0" sldId="274"/>
+        </pc:sldMkLst>
+        <pc:picChg chg="mod">
+          <ac:chgData name="Riccardo Berta" userId="c8694f89-bba4-4576-b0a8-456619ca5a8c" providerId="ADAL" clId="{3F77A462-6347-E641-AA99-0C769B8B031A}" dt="2022-03-09T07:57:44.129" v="19"/>
+          <ac:picMkLst>
+            <pc:docMk/>
+            <pc:sldMk cId="0" sldId="274"/>
+            <ac:picMk id="296" creationId="{00000000-0000-0000-0000-000000000000}"/>
+          </ac:picMkLst>
+        </pc:picChg>
+      </pc:sldChg>
+      <pc:sldChg chg="modSp">
+        <pc:chgData name="Riccardo Berta" userId="c8694f89-bba4-4576-b0a8-456619ca5a8c" providerId="ADAL" clId="{3F77A462-6347-E641-AA99-0C769B8B031A}" dt="2022-03-09T07:57:58.927" v="20"/>
+        <pc:sldMkLst>
+          <pc:docMk/>
+          <pc:sldMk cId="0" sldId="275"/>
+        </pc:sldMkLst>
+        <pc:picChg chg="mod">
+          <ac:chgData name="Riccardo Berta" userId="c8694f89-bba4-4576-b0a8-456619ca5a8c" providerId="ADAL" clId="{3F77A462-6347-E641-AA99-0C769B8B031A}" dt="2022-03-09T07:57:58.927" v="20"/>
+          <ac:picMkLst>
+            <pc:docMk/>
+            <pc:sldMk cId="0" sldId="275"/>
+            <ac:picMk id="306" creationId="{00000000-0000-0000-0000-000000000000}"/>
+          </ac:picMkLst>
+        </pc:picChg>
+      </pc:sldChg>
+      <pc:sldChg chg="modSp">
+        <pc:chgData name="Riccardo Berta" userId="c8694f89-bba4-4576-b0a8-456619ca5a8c" providerId="ADAL" clId="{3F77A462-6347-E641-AA99-0C769B8B031A}" dt="2022-03-09T07:58:20.112" v="21"/>
+        <pc:sldMkLst>
+          <pc:docMk/>
+          <pc:sldMk cId="0" sldId="276"/>
+        </pc:sldMkLst>
+        <pc:picChg chg="mod">
+          <ac:chgData name="Riccardo Berta" userId="c8694f89-bba4-4576-b0a8-456619ca5a8c" providerId="ADAL" clId="{3F77A462-6347-E641-AA99-0C769B8B031A}" dt="2022-03-09T07:58:20.112" v="21"/>
+          <ac:picMkLst>
+            <pc:docMk/>
+            <pc:sldMk cId="0" sldId="276"/>
+            <ac:picMk id="317" creationId="{00000000-0000-0000-0000-000000000000}"/>
+          </ac:picMkLst>
+        </pc:picChg>
+      </pc:sldChg>
+      <pc:sldChg chg="modSp mod">
+        <pc:chgData name="Riccardo Berta" userId="c8694f89-bba4-4576-b0a8-456619ca5a8c" providerId="ADAL" clId="{3F77A462-6347-E641-AA99-0C769B8B031A}" dt="2022-03-16T09:45:29.960" v="220" actId="20577"/>
+        <pc:sldMkLst>
+          <pc:docMk/>
+          <pc:sldMk cId="0" sldId="277"/>
+        </pc:sldMkLst>
+        <pc:spChg chg="mod">
+          <ac:chgData name="Riccardo Berta" userId="c8694f89-bba4-4576-b0a8-456619ca5a8c" providerId="ADAL" clId="{3F77A462-6347-E641-AA99-0C769B8B031A}" dt="2022-03-16T09:45:29.960" v="220" actId="20577"/>
+          <ac:spMkLst>
+            <pc:docMk/>
+            <pc:sldMk cId="0" sldId="277"/>
+            <ac:spMk id="323" creationId="{00000000-0000-0000-0000-000000000000}"/>
+          </ac:spMkLst>
+        </pc:spChg>
+      </pc:sldChg>
+    </pc:docChg>
+  </pc:docChgLst>
   <pc:docChgLst>
     <pc:chgData name="Riccardo Berta" userId="c8694f89-bba4-4576-b0a8-456619ca5a8c" providerId="ADAL" clId="{97383AD6-40CD-6A43-8934-40A237B55ECF}"/>
     <pc:docChg chg="undo custSel modSld">
@@ -883,355 +1232,6 @@
         </pc:sldMkLst>
         <pc:spChg chg="mod">
           <ac:chgData name="Riccardo Berta" userId="c8694f89-bba4-4576-b0a8-456619ca5a8c" providerId="ADAL" clId="{97383AD6-40CD-6A43-8934-40A237B55ECF}" dt="2023-03-23T09:51:53.369" v="558" actId="20577"/>
-          <ac:spMkLst>
-            <pc:docMk/>
-            <pc:sldMk cId="0" sldId="277"/>
-            <ac:spMk id="323" creationId="{00000000-0000-0000-0000-000000000000}"/>
-          </ac:spMkLst>
-        </pc:spChg>
-      </pc:sldChg>
-    </pc:docChg>
-  </pc:docChgLst>
-  <pc:docChgLst>
-    <pc:chgData name="Riccardo Berta" userId="c8694f89-bba4-4576-b0a8-456619ca5a8c" providerId="ADAL" clId="{3F77A462-6347-E641-AA99-0C769B8B031A}"/>
-    <pc:docChg chg="undo custSel modSld">
-      <pc:chgData name="Riccardo Berta" userId="c8694f89-bba4-4576-b0a8-456619ca5a8c" providerId="ADAL" clId="{3F77A462-6347-E641-AA99-0C769B8B031A}" dt="2022-03-16T09:45:29.960" v="220" actId="20577"/>
-      <pc:docMkLst>
-        <pc:docMk/>
-      </pc:docMkLst>
-      <pc:sldChg chg="addSp modSp mod modNotes">
-        <pc:chgData name="Riccardo Berta" userId="c8694f89-bba4-4576-b0a8-456619ca5a8c" providerId="ADAL" clId="{3F77A462-6347-E641-AA99-0C769B8B031A}" dt="2022-03-11T12:13:12.844" v="32" actId="1076"/>
-        <pc:sldMkLst>
-          <pc:docMk/>
-          <pc:sldMk cId="0" sldId="257"/>
-        </pc:sldMkLst>
-        <pc:spChg chg="mod">
-          <ac:chgData name="Riccardo Berta" userId="c8694f89-bba4-4576-b0a8-456619ca5a8c" providerId="ADAL" clId="{3F77A462-6347-E641-AA99-0C769B8B031A}" dt="2022-03-11T12:13:10.767" v="31" actId="1076"/>
-          <ac:spMkLst>
-            <pc:docMk/>
-            <pc:sldMk cId="0" sldId="257"/>
-            <ac:spMk id="137" creationId="{00000000-0000-0000-0000-000000000000}"/>
-          </ac:spMkLst>
-        </pc:spChg>
-        <pc:picChg chg="mod">
-          <ac:chgData name="Riccardo Berta" userId="c8694f89-bba4-4576-b0a8-456619ca5a8c" providerId="ADAL" clId="{3F77A462-6347-E641-AA99-0C769B8B031A}" dt="2022-03-09T07:50:58.538" v="0"/>
-          <ac:picMkLst>
-            <pc:docMk/>
-            <pc:sldMk cId="0" sldId="257"/>
-            <ac:picMk id="138" creationId="{00000000-0000-0000-0000-000000000000}"/>
-          </ac:picMkLst>
-        </pc:picChg>
-        <pc:picChg chg="add mod">
-          <ac:chgData name="Riccardo Berta" userId="c8694f89-bba4-4576-b0a8-456619ca5a8c" providerId="ADAL" clId="{3F77A462-6347-E641-AA99-0C769B8B031A}" dt="2022-03-11T12:13:12.844" v="32" actId="1076"/>
-          <ac:picMkLst>
-            <pc:docMk/>
-            <pc:sldMk cId="0" sldId="257"/>
-            <ac:picMk id="1026" creationId="{C8FFA10B-2EBE-A649-BE34-AB2456924AC7}"/>
-          </ac:picMkLst>
-        </pc:picChg>
-      </pc:sldChg>
-      <pc:sldChg chg="modSp mod">
-        <pc:chgData name="Riccardo Berta" userId="c8694f89-bba4-4576-b0a8-456619ca5a8c" providerId="ADAL" clId="{3F77A462-6347-E641-AA99-0C769B8B031A}" dt="2022-03-11T12:13:55.107" v="34" actId="1076"/>
-        <pc:sldMkLst>
-          <pc:docMk/>
-          <pc:sldMk cId="0" sldId="258"/>
-        </pc:sldMkLst>
-        <pc:picChg chg="mod">
-          <ac:chgData name="Riccardo Berta" userId="c8694f89-bba4-4576-b0a8-456619ca5a8c" providerId="ADAL" clId="{3F77A462-6347-E641-AA99-0C769B8B031A}" dt="2022-03-11T12:13:55.107" v="34" actId="1076"/>
-          <ac:picMkLst>
-            <pc:docMk/>
-            <pc:sldMk cId="0" sldId="258"/>
-            <ac:picMk id="145" creationId="{00000000-0000-0000-0000-000000000000}"/>
-          </ac:picMkLst>
-        </pc:picChg>
-        <pc:picChg chg="mod">
-          <ac:chgData name="Riccardo Berta" userId="c8694f89-bba4-4576-b0a8-456619ca5a8c" providerId="ADAL" clId="{3F77A462-6347-E641-AA99-0C769B8B031A}" dt="2022-03-09T07:51:15.296" v="1"/>
-          <ac:picMkLst>
-            <pc:docMk/>
-            <pc:sldMk cId="0" sldId="258"/>
-            <ac:picMk id="146" creationId="{00000000-0000-0000-0000-000000000000}"/>
-          </ac:picMkLst>
-        </pc:picChg>
-      </pc:sldChg>
-      <pc:sldChg chg="modSp">
-        <pc:chgData name="Riccardo Berta" userId="c8694f89-bba4-4576-b0a8-456619ca5a8c" providerId="ADAL" clId="{3F77A462-6347-E641-AA99-0C769B8B031A}" dt="2022-03-09T07:51:41.496" v="3"/>
-        <pc:sldMkLst>
-          <pc:docMk/>
-          <pc:sldMk cId="0" sldId="259"/>
-        </pc:sldMkLst>
-        <pc:picChg chg="mod">
-          <ac:chgData name="Riccardo Berta" userId="c8694f89-bba4-4576-b0a8-456619ca5a8c" providerId="ADAL" clId="{3F77A462-6347-E641-AA99-0C769B8B031A}" dt="2022-03-09T07:51:41.496" v="3"/>
-          <ac:picMkLst>
-            <pc:docMk/>
-            <pc:sldMk cId="0" sldId="259"/>
-            <ac:picMk id="171" creationId="{00000000-0000-0000-0000-000000000000}"/>
-          </ac:picMkLst>
-        </pc:picChg>
-      </pc:sldChg>
-      <pc:sldChg chg="modSp mod">
-        <pc:chgData name="Riccardo Berta" userId="c8694f89-bba4-4576-b0a8-456619ca5a8c" providerId="ADAL" clId="{3F77A462-6347-E641-AA99-0C769B8B031A}" dt="2022-03-11T12:21:40.468" v="36" actId="167"/>
-        <pc:sldMkLst>
-          <pc:docMk/>
-          <pc:sldMk cId="0" sldId="260"/>
-        </pc:sldMkLst>
-        <pc:picChg chg="mod">
-          <ac:chgData name="Riccardo Berta" userId="c8694f89-bba4-4576-b0a8-456619ca5a8c" providerId="ADAL" clId="{3F77A462-6347-E641-AA99-0C769B8B031A}" dt="2022-03-11T12:21:40.468" v="36" actId="167"/>
-          <ac:picMkLst>
-            <pc:docMk/>
-            <pc:sldMk cId="0" sldId="260"/>
-            <ac:picMk id="179" creationId="{00000000-0000-0000-0000-000000000000}"/>
-          </ac:picMkLst>
-        </pc:picChg>
-        <pc:picChg chg="mod">
-          <ac:chgData name="Riccardo Berta" userId="c8694f89-bba4-4576-b0a8-456619ca5a8c" providerId="ADAL" clId="{3F77A462-6347-E641-AA99-0C769B8B031A}" dt="2022-03-09T07:52:02.933" v="4"/>
-          <ac:picMkLst>
-            <pc:docMk/>
-            <pc:sldMk cId="0" sldId="260"/>
-            <ac:picMk id="180" creationId="{00000000-0000-0000-0000-000000000000}"/>
-          </ac:picMkLst>
-        </pc:picChg>
-      </pc:sldChg>
-      <pc:sldChg chg="modSp mod">
-        <pc:chgData name="Riccardo Berta" userId="c8694f89-bba4-4576-b0a8-456619ca5a8c" providerId="ADAL" clId="{3F77A462-6347-E641-AA99-0C769B8B031A}" dt="2022-03-09T07:52:21.749" v="6"/>
-        <pc:sldMkLst>
-          <pc:docMk/>
-          <pc:sldMk cId="0" sldId="261"/>
-        </pc:sldMkLst>
-        <pc:picChg chg="mod">
-          <ac:chgData name="Riccardo Berta" userId="c8694f89-bba4-4576-b0a8-456619ca5a8c" providerId="ADAL" clId="{3F77A462-6347-E641-AA99-0C769B8B031A}" dt="2022-03-09T07:52:21.749" v="6"/>
-          <ac:picMkLst>
-            <pc:docMk/>
-            <pc:sldMk cId="0" sldId="261"/>
-            <ac:picMk id="187" creationId="{00000000-0000-0000-0000-000000000000}"/>
-          </ac:picMkLst>
-        </pc:picChg>
-      </pc:sldChg>
-      <pc:sldChg chg="modSp">
-        <pc:chgData name="Riccardo Berta" userId="c8694f89-bba4-4576-b0a8-456619ca5a8c" providerId="ADAL" clId="{3F77A462-6347-E641-AA99-0C769B8B031A}" dt="2022-03-09T07:52:39.725" v="7"/>
-        <pc:sldMkLst>
-          <pc:docMk/>
-          <pc:sldMk cId="0" sldId="262"/>
-        </pc:sldMkLst>
-        <pc:picChg chg="mod">
-          <ac:chgData name="Riccardo Berta" userId="c8694f89-bba4-4576-b0a8-456619ca5a8c" providerId="ADAL" clId="{3F77A462-6347-E641-AA99-0C769B8B031A}" dt="2022-03-09T07:52:39.725" v="7"/>
-          <ac:picMkLst>
-            <pc:docMk/>
-            <pc:sldMk cId="0" sldId="262"/>
-            <ac:picMk id="194" creationId="{00000000-0000-0000-0000-000000000000}"/>
-          </ac:picMkLst>
-        </pc:picChg>
-      </pc:sldChg>
-      <pc:sldChg chg="modSp">
-        <pc:chgData name="Riccardo Berta" userId="c8694f89-bba4-4576-b0a8-456619ca5a8c" providerId="ADAL" clId="{3F77A462-6347-E641-AA99-0C769B8B031A}" dt="2022-03-09T07:52:55.942" v="8"/>
-        <pc:sldMkLst>
-          <pc:docMk/>
-          <pc:sldMk cId="0" sldId="263"/>
-        </pc:sldMkLst>
-        <pc:picChg chg="mod">
-          <ac:chgData name="Riccardo Berta" userId="c8694f89-bba4-4576-b0a8-456619ca5a8c" providerId="ADAL" clId="{3F77A462-6347-E641-AA99-0C769B8B031A}" dt="2022-03-09T07:52:55.942" v="8"/>
-          <ac:picMkLst>
-            <pc:docMk/>
-            <pc:sldMk cId="0" sldId="263"/>
-            <ac:picMk id="201" creationId="{00000000-0000-0000-0000-000000000000}"/>
-          </ac:picMkLst>
-        </pc:picChg>
-      </pc:sldChg>
-      <pc:sldChg chg="modSp">
-        <pc:chgData name="Riccardo Berta" userId="c8694f89-bba4-4576-b0a8-456619ca5a8c" providerId="ADAL" clId="{3F77A462-6347-E641-AA99-0C769B8B031A}" dt="2022-03-09T07:53:19.757" v="9"/>
-        <pc:sldMkLst>
-          <pc:docMk/>
-          <pc:sldMk cId="0" sldId="265"/>
-        </pc:sldMkLst>
-        <pc:picChg chg="mod">
-          <ac:chgData name="Riccardo Berta" userId="c8694f89-bba4-4576-b0a8-456619ca5a8c" providerId="ADAL" clId="{3F77A462-6347-E641-AA99-0C769B8B031A}" dt="2022-03-09T07:53:19.757" v="9"/>
-          <ac:picMkLst>
-            <pc:docMk/>
-            <pc:sldMk cId="0" sldId="265"/>
-            <ac:picMk id="215" creationId="{00000000-0000-0000-0000-000000000000}"/>
-          </ac:picMkLst>
-        </pc:picChg>
-      </pc:sldChg>
-      <pc:sldChg chg="modSp">
-        <pc:chgData name="Riccardo Berta" userId="c8694f89-bba4-4576-b0a8-456619ca5a8c" providerId="ADAL" clId="{3F77A462-6347-E641-AA99-0C769B8B031A}" dt="2022-03-09T07:53:34.123" v="10"/>
-        <pc:sldMkLst>
-          <pc:docMk/>
-          <pc:sldMk cId="0" sldId="266"/>
-        </pc:sldMkLst>
-        <pc:picChg chg="mod">
-          <ac:chgData name="Riccardo Berta" userId="c8694f89-bba4-4576-b0a8-456619ca5a8c" providerId="ADAL" clId="{3F77A462-6347-E641-AA99-0C769B8B031A}" dt="2022-03-09T07:53:34.123" v="10"/>
-          <ac:picMkLst>
-            <pc:docMk/>
-            <pc:sldMk cId="0" sldId="266"/>
-            <ac:picMk id="222" creationId="{00000000-0000-0000-0000-000000000000}"/>
-          </ac:picMkLst>
-        </pc:picChg>
-      </pc:sldChg>
-      <pc:sldChg chg="modSp">
-        <pc:chgData name="Riccardo Berta" userId="c8694f89-bba4-4576-b0a8-456619ca5a8c" providerId="ADAL" clId="{3F77A462-6347-E641-AA99-0C769B8B031A}" dt="2022-03-09T07:53:50.564" v="11"/>
-        <pc:sldMkLst>
-          <pc:docMk/>
-          <pc:sldMk cId="0" sldId="267"/>
-        </pc:sldMkLst>
-        <pc:picChg chg="mod">
-          <ac:chgData name="Riccardo Berta" userId="c8694f89-bba4-4576-b0a8-456619ca5a8c" providerId="ADAL" clId="{3F77A462-6347-E641-AA99-0C769B8B031A}" dt="2022-03-09T07:53:50.564" v="11"/>
-          <ac:picMkLst>
-            <pc:docMk/>
-            <pc:sldMk cId="0" sldId="267"/>
-            <ac:picMk id="229" creationId="{00000000-0000-0000-0000-000000000000}"/>
-          </ac:picMkLst>
-        </pc:picChg>
-      </pc:sldChg>
-      <pc:sldChg chg="modSp">
-        <pc:chgData name="Riccardo Berta" userId="c8694f89-bba4-4576-b0a8-456619ca5a8c" providerId="ADAL" clId="{3F77A462-6347-E641-AA99-0C769B8B031A}" dt="2022-03-09T07:54:05.287" v="12"/>
-        <pc:sldMkLst>
-          <pc:docMk/>
-          <pc:sldMk cId="0" sldId="268"/>
-        </pc:sldMkLst>
-        <pc:picChg chg="mod">
-          <ac:chgData name="Riccardo Berta" userId="c8694f89-bba4-4576-b0a8-456619ca5a8c" providerId="ADAL" clId="{3F77A462-6347-E641-AA99-0C769B8B031A}" dt="2022-03-09T07:54:05.287" v="12"/>
-          <ac:picMkLst>
-            <pc:docMk/>
-            <pc:sldMk cId="0" sldId="268"/>
-            <ac:picMk id="236" creationId="{00000000-0000-0000-0000-000000000000}"/>
-          </ac:picMkLst>
-        </pc:picChg>
-      </pc:sldChg>
-      <pc:sldChg chg="modSp">
-        <pc:chgData name="Riccardo Berta" userId="c8694f89-bba4-4576-b0a8-456619ca5a8c" providerId="ADAL" clId="{3F77A462-6347-E641-AA99-0C769B8B031A}" dt="2022-03-09T07:54:21.879" v="13"/>
-        <pc:sldMkLst>
-          <pc:docMk/>
-          <pc:sldMk cId="0" sldId="269"/>
-        </pc:sldMkLst>
-        <pc:picChg chg="mod">
-          <ac:chgData name="Riccardo Berta" userId="c8694f89-bba4-4576-b0a8-456619ca5a8c" providerId="ADAL" clId="{3F77A462-6347-E641-AA99-0C769B8B031A}" dt="2022-03-09T07:54:21.879" v="13"/>
-          <ac:picMkLst>
-            <pc:docMk/>
-            <pc:sldMk cId="0" sldId="269"/>
-            <ac:picMk id="250" creationId="{00000000-0000-0000-0000-000000000000}"/>
-          </ac:picMkLst>
-        </pc:picChg>
-      </pc:sldChg>
-      <pc:sldChg chg="modSp mod">
-        <pc:chgData name="Riccardo Berta" userId="c8694f89-bba4-4576-b0a8-456619ca5a8c" providerId="ADAL" clId="{3F77A462-6347-E641-AA99-0C769B8B031A}" dt="2022-03-11T12:28:10.724" v="44" actId="12"/>
-        <pc:sldMkLst>
-          <pc:docMk/>
-          <pc:sldMk cId="0" sldId="270"/>
-        </pc:sldMkLst>
-        <pc:spChg chg="mod">
-          <ac:chgData name="Riccardo Berta" userId="c8694f89-bba4-4576-b0a8-456619ca5a8c" providerId="ADAL" clId="{3F77A462-6347-E641-AA99-0C769B8B031A}" dt="2022-03-11T12:28:10.724" v="44" actId="12"/>
-          <ac:spMkLst>
-            <pc:docMk/>
-            <pc:sldMk cId="0" sldId="270"/>
-            <ac:spMk id="256" creationId="{00000000-0000-0000-0000-000000000000}"/>
-          </ac:spMkLst>
-        </pc:spChg>
-        <pc:picChg chg="mod">
-          <ac:chgData name="Riccardo Berta" userId="c8694f89-bba4-4576-b0a8-456619ca5a8c" providerId="ADAL" clId="{3F77A462-6347-E641-AA99-0C769B8B031A}" dt="2022-03-11T12:27:30.095" v="40" actId="1076"/>
-          <ac:picMkLst>
-            <pc:docMk/>
-            <pc:sldMk cId="0" sldId="270"/>
-            <ac:picMk id="257" creationId="{00000000-0000-0000-0000-000000000000}"/>
-          </ac:picMkLst>
-        </pc:picChg>
-      </pc:sldChg>
-      <pc:sldChg chg="modSp">
-        <pc:chgData name="Riccardo Berta" userId="c8694f89-bba4-4576-b0a8-456619ca5a8c" providerId="ADAL" clId="{3F77A462-6347-E641-AA99-0C769B8B031A}" dt="2022-03-09T07:55:07.493" v="17"/>
-        <pc:sldMkLst>
-          <pc:docMk/>
-          <pc:sldMk cId="0" sldId="271"/>
-        </pc:sldMkLst>
-        <pc:picChg chg="mod">
-          <ac:chgData name="Riccardo Berta" userId="c8694f89-bba4-4576-b0a8-456619ca5a8c" providerId="ADAL" clId="{3F77A462-6347-E641-AA99-0C769B8B031A}" dt="2022-03-09T07:55:07.493" v="17"/>
-          <ac:picMkLst>
-            <pc:docMk/>
-            <pc:sldMk cId="0" sldId="271"/>
-            <ac:picMk id="264" creationId="{00000000-0000-0000-0000-000000000000}"/>
-          </ac:picMkLst>
-        </pc:picChg>
-      </pc:sldChg>
-      <pc:sldChg chg="modSp">
-        <pc:chgData name="Riccardo Berta" userId="c8694f89-bba4-4576-b0a8-456619ca5a8c" providerId="ADAL" clId="{3F77A462-6347-E641-AA99-0C769B8B031A}" dt="2022-03-09T07:55:31.746" v="18"/>
-        <pc:sldMkLst>
-          <pc:docMk/>
-          <pc:sldMk cId="0" sldId="272"/>
-        </pc:sldMkLst>
-        <pc:picChg chg="mod">
-          <ac:chgData name="Riccardo Berta" userId="c8694f89-bba4-4576-b0a8-456619ca5a8c" providerId="ADAL" clId="{3F77A462-6347-E641-AA99-0C769B8B031A}" dt="2022-03-09T07:55:31.746" v="18"/>
-          <ac:picMkLst>
-            <pc:docMk/>
-            <pc:sldMk cId="0" sldId="272"/>
-            <ac:picMk id="272" creationId="{00000000-0000-0000-0000-000000000000}"/>
-          </ac:picMkLst>
-        </pc:picChg>
-      </pc:sldChg>
-      <pc:sldChg chg="modSp">
-        <pc:chgData name="Riccardo Berta" userId="c8694f89-bba4-4576-b0a8-456619ca5a8c" providerId="ADAL" clId="{3F77A462-6347-E641-AA99-0C769B8B031A}" dt="2022-03-09T07:58:55.124" v="22"/>
-        <pc:sldMkLst>
-          <pc:docMk/>
-          <pc:sldMk cId="0" sldId="273"/>
-        </pc:sldMkLst>
-        <pc:picChg chg="mod">
-          <ac:chgData name="Riccardo Berta" userId="c8694f89-bba4-4576-b0a8-456619ca5a8c" providerId="ADAL" clId="{3F77A462-6347-E641-AA99-0C769B8B031A}" dt="2022-03-09T07:58:55.124" v="22"/>
-          <ac:picMkLst>
-            <pc:docMk/>
-            <pc:sldMk cId="0" sldId="273"/>
-            <ac:picMk id="283" creationId="{00000000-0000-0000-0000-000000000000}"/>
-          </ac:picMkLst>
-        </pc:picChg>
-      </pc:sldChg>
-      <pc:sldChg chg="modSp">
-        <pc:chgData name="Riccardo Berta" userId="c8694f89-bba4-4576-b0a8-456619ca5a8c" providerId="ADAL" clId="{3F77A462-6347-E641-AA99-0C769B8B031A}" dt="2022-03-09T07:57:44.129" v="19"/>
-        <pc:sldMkLst>
-          <pc:docMk/>
-          <pc:sldMk cId="0" sldId="274"/>
-        </pc:sldMkLst>
-        <pc:picChg chg="mod">
-          <ac:chgData name="Riccardo Berta" userId="c8694f89-bba4-4576-b0a8-456619ca5a8c" providerId="ADAL" clId="{3F77A462-6347-E641-AA99-0C769B8B031A}" dt="2022-03-09T07:57:44.129" v="19"/>
-          <ac:picMkLst>
-            <pc:docMk/>
-            <pc:sldMk cId="0" sldId="274"/>
-            <ac:picMk id="296" creationId="{00000000-0000-0000-0000-000000000000}"/>
-          </ac:picMkLst>
-        </pc:picChg>
-      </pc:sldChg>
-      <pc:sldChg chg="modSp">
-        <pc:chgData name="Riccardo Berta" userId="c8694f89-bba4-4576-b0a8-456619ca5a8c" providerId="ADAL" clId="{3F77A462-6347-E641-AA99-0C769B8B031A}" dt="2022-03-09T07:57:58.927" v="20"/>
-        <pc:sldMkLst>
-          <pc:docMk/>
-          <pc:sldMk cId="0" sldId="275"/>
-        </pc:sldMkLst>
-        <pc:picChg chg="mod">
-          <ac:chgData name="Riccardo Berta" userId="c8694f89-bba4-4576-b0a8-456619ca5a8c" providerId="ADAL" clId="{3F77A462-6347-E641-AA99-0C769B8B031A}" dt="2022-03-09T07:57:58.927" v="20"/>
-          <ac:picMkLst>
-            <pc:docMk/>
-            <pc:sldMk cId="0" sldId="275"/>
-            <ac:picMk id="306" creationId="{00000000-0000-0000-0000-000000000000}"/>
-          </ac:picMkLst>
-        </pc:picChg>
-      </pc:sldChg>
-      <pc:sldChg chg="modSp">
-        <pc:chgData name="Riccardo Berta" userId="c8694f89-bba4-4576-b0a8-456619ca5a8c" providerId="ADAL" clId="{3F77A462-6347-E641-AA99-0C769B8B031A}" dt="2022-03-09T07:58:20.112" v="21"/>
-        <pc:sldMkLst>
-          <pc:docMk/>
-          <pc:sldMk cId="0" sldId="276"/>
-        </pc:sldMkLst>
-        <pc:picChg chg="mod">
-          <ac:chgData name="Riccardo Berta" userId="c8694f89-bba4-4576-b0a8-456619ca5a8c" providerId="ADAL" clId="{3F77A462-6347-E641-AA99-0C769B8B031A}" dt="2022-03-09T07:58:20.112" v="21"/>
-          <ac:picMkLst>
-            <pc:docMk/>
-            <pc:sldMk cId="0" sldId="276"/>
-            <ac:picMk id="317" creationId="{00000000-0000-0000-0000-000000000000}"/>
-          </ac:picMkLst>
-        </pc:picChg>
-      </pc:sldChg>
-      <pc:sldChg chg="modSp mod">
-        <pc:chgData name="Riccardo Berta" userId="c8694f89-bba4-4576-b0a8-456619ca5a8c" providerId="ADAL" clId="{3F77A462-6347-E641-AA99-0C769B8B031A}" dt="2022-03-16T09:45:29.960" v="220" actId="20577"/>
-        <pc:sldMkLst>
-          <pc:docMk/>
-          <pc:sldMk cId="0" sldId="277"/>
-        </pc:sldMkLst>
-        <pc:spChg chg="mod">
-          <ac:chgData name="Riccardo Berta" userId="c8694f89-bba4-4576-b0a8-456619ca5a8c" providerId="ADAL" clId="{3F77A462-6347-E641-AA99-0C769B8B031A}" dt="2022-03-16T09:45:29.960" v="220" actId="20577"/>
           <ac:spMkLst>
             <pc:docMk/>
             <pc:sldMk cId="0" sldId="277"/>
@@ -21908,7 +21908,7 @@
             </a:pPr>
             <a:r>
               <a:rPr lang="en-GB" dirty="0"/>
-              <a:t>after that client disconnect the connection</a:t>
+              <a:t>after that client disconnect the connection is closed</a:t>
             </a:r>
             <a:endParaRPr dirty="0"/>
           </a:p>
